--- a/public/fun/pack/pptx/newspro/카드뉴스프리미엄_25_오늘의한마디_선셋로즈.pptx
+++ b/public/fun/pack/pptx/newspro/카드뉴스프리미엄_25_오늘의한마디_선셋로즈.pptx
@@ -113,12 +113,12 @@
   <p:extLst>
     <p:ext uri="{521415D9-36F7-43E2-AB2F-B90AF26B5E84}">
       <p14:sectionLst xmlns:p14="http://schemas.microsoft.com/office/powerpoint/2010/main">
-        <p14:section name="시작" id="{68E21F49-FA57-4BB2-9DFB-46BE168DAC28}">
+        <p14:section name="시작" id="{12C8F355-E883-4FCB-BC13-72E7E9576AED}">
           <p14:sldIdLst>
             <p14:sldId id="256"/>
           </p14:sldIdLst>
         </p14:section>
-        <p14:section name="본문" id="{887F3440-40B4-46A9-B679-66159BD36DE3}">
+        <p14:section name="본문" id="{52566388-2A10-4A2F-B613-8D3178F89252}">
           <p14:sldIdLst>
             <p14:sldId id="257"/>
             <p14:sldId id="258"/>
@@ -127,7 +127,7 @@
             <p14:sldId id="261"/>
           </p14:sldIdLst>
         </p14:section>
-        <p14:section name="마무리" id="{36608E81-28AE-4EFD-8849-92B03335ADF0}">
+        <p14:section name="마무리" id="{17BA08C5-7AF6-4BAD-A393-87C878CCBA21}">
           <p14:sldIdLst>
             <p14:sldId id="262"/>
           </p14:sldIdLst>
@@ -1536,7 +1536,7 @@
             </a:lvl1pPr>
           </a:lstStyle>
           <a:p>
-            <a:fld id="{EADEF751-A55C-4B0E-AD3D-AEFD0070F2A6}" type="slidenum">
+            <a:fld id="{C9F82753-FF01-4E56-934E-CEB80B47E64B}" type="slidenum">
               <a:rPr lang="en-US"/>
               <a:t>‹#›</a:t>
             </a:fld>
@@ -2548,7 +2548,7 @@
             </a:lvl1pPr>
           </a:lstStyle>
           <a:p>
-            <a:fld id="{5E9A0423-F901-4B98-9625-FC0B9861D5E7}" type="slidenum">
+            <a:fld id="{D397A498-FBE9-422E-88BB-777D5F7B7806}" type="slidenum">
               <a:rPr lang="en-US"/>
               <a:t>‹#›</a:t>
             </a:fld>
@@ -3558,7 +3558,7 @@
             </a:lvl1pPr>
           </a:lstStyle>
           <a:p>
-            <a:fld id="{E779FB4B-7804-4C26-9655-C6A993EFAE5D}" type="slidenum">
+            <a:fld id="{F33319C3-F120-413D-8A5E-B8C0A8B4C0FC}" type="slidenum">
               <a:rPr lang="en-US"/>
               <a:t>‹#›</a:t>
             </a:fld>
@@ -4806,7 +4806,7 @@
           <a:bodyPr/>
           <a:lstStyle/>
           <a:p>
-            <a:fld id="{420B7D39-0B4C-4052-8B12-9F9FB00BB72C}" type="slidenum">
+            <a:fld id="{5F6D7CCD-C8DE-4444-AF9C-FCE0CBC8D5D5}" type="slidenum">
               <a:rPr lang="en-US"/>
               <a:t>‹#›</a:t>
             </a:fld>
@@ -4972,7 +4972,7 @@
           <a:bodyPr/>
           <a:lstStyle/>
           <a:p>
-            <a:fld id="{52E6226B-E8E9-4322-8F5B-B791DB65D3AB}" type="slidenum">
+            <a:fld id="{27B144A5-298A-4EF9-B20A-40D570A2AF5A}" type="slidenum">
               <a:rPr lang="en-US"/>
               <a:t>‹#›</a:t>
             </a:fld>
@@ -5138,7 +5138,7 @@
           <a:bodyPr/>
           <a:lstStyle/>
           <a:p>
-            <a:fld id="{263D9810-060C-4668-B7BD-E883CA3B2BD3}" type="slidenum">
+            <a:fld id="{DFD10864-B949-4ED2-A533-0FD0B40495C0}" type="slidenum">
               <a:rPr lang="en-US"/>
               <a:t>‹#›</a:t>
             </a:fld>
@@ -5304,7 +5304,7 @@
           <a:bodyPr/>
           <a:lstStyle/>
           <a:p>
-            <a:fld id="{B2DF8D71-6E27-44CB-98E3-394621ADF4A2}" type="slidenum">
+            <a:fld id="{E3737248-23EA-483C-8E19-64ADAAB41BDC}" type="slidenum">
               <a:rPr lang="en-US"/>
               <a:t>‹#›</a:t>
             </a:fld>
@@ -5470,7 +5470,7 @@
           <a:bodyPr/>
           <a:lstStyle/>
           <a:p>
-            <a:fld id="{3710FA7B-A52E-499F-A880-28114F5900AE}" type="slidenum">
+            <a:fld id="{9C55B7E1-685B-40DD-87C7-691D80EDF5C7}" type="slidenum">
               <a:rPr lang="en-US"/>
               <a:t>‹#›</a:t>
             </a:fld>
